--- a/AI-CoE-Pitch-Deck.pptx
+++ b/AI-CoE-Pitch-Deck.pptx
@@ -1118,7 +1118,7 @@
             <a:r>
               <a:rPr lang="en-US" dirty="0"/>
               <a:t>Optional slide — use it only when the audience asks about Microsoft-led delivery or when the account profile obviously demands it (regulated, sovereign, flagship).
-Key framing: ISD is a layered option, not a replacement for the two-stream model. Streams 1 and 2 remain the default for the RSA motion.
+Key framing: ISD is a layered option, not a replacement for the three-stream model. Streams 1, 2, and 3 remain the default for the RSA motion.
 Three models — pick one in Stage 1, not Stage 3:
 • Model A (ISD-only) — Microsoft delivers end-to-end. Use for sovereign/regulated workloads where no partner can credibly deliver in country.
 • Model B (ISD + Partner) — ISD primes the SoW, Anchor Partner is subcontracted. Use when customer wants Microsoft accountability but partner brings industry IP or scale.
@@ -12044,7 +12044,7 @@
                 <a:ea typeface="Segoe UI" pitchFamily="34" charset="-122"/>
                 <a:cs typeface="Segoe UI" pitchFamily="34" charset="-120"/>
               </a:rPr>
-              <a:t>Layered onto the two-stream model when the customer, workload, or partner gap requires Microsoft-led delivery.</a:t>
+              <a:t>Layered onto the three-stream model when the customer, workload, or partner gap requires Microsoft-led delivery.</a:t>
             </a:r>
             <a:endParaRPr lang="en-US" sz="1200" dirty="0"/>
           </a:p>

--- a/AI-CoE-Pitch-Deck.pptx
+++ b/AI-CoE-Pitch-Deck.pptx
@@ -2723,6 +2723,226 @@
           </a:p>
         </p:txBody>
       </p:sp>
+      <p:sp>
+        <p:nvSpPr>
+          <p:cNvPr id="13" name="AICOE_GEO_ACCENT_Right Triangle 12"/>
+          <p:cNvSpPr/>
+          <p:nvPr/>
+        </p:nvSpPr>
+        <p:spPr>
+          <a:xfrm>
+            <a:off x="11369040" y="445770"/>
+            <a:ext cx="822960" cy="822960"/>
+          </a:xfrm>
+          <a:prstGeom prst="rtTriangle">
+            <a:avLst/>
+          </a:prstGeom>
+          <a:solidFill>
+            <a:srgbClr val="0B1F3A"/>
+          </a:solidFill>
+          <a:ln>
+            <a:noFill/>
+          </a:ln>
+          <a:effectLst/>
+        </p:spPr>
+        <p:style>
+          <a:lnRef idx="1">
+            <a:schemeClr val="accent1"/>
+          </a:lnRef>
+          <a:fillRef idx="3">
+            <a:schemeClr val="accent1"/>
+          </a:fillRef>
+          <a:effectRef idx="2">
+            <a:schemeClr val="accent1"/>
+          </a:effectRef>
+          <a:fontRef idx="minor">
+            <a:schemeClr val="lt1"/>
+          </a:fontRef>
+        </p:style>
+        <p:txBody>
+          <a:bodyPr rtlCol="0" anchor="ctr"/>
+          <a:lstStyle/>
+          <a:p>
+            <a:pPr algn="ctr"/>
+          </a:p>
+        </p:txBody>
+      </p:sp>
+      <p:sp>
+        <p:nvSpPr>
+          <p:cNvPr id="14" name="AICOE_GEO_ACCENT_Right Triangle 13"/>
+          <p:cNvSpPr/>
+          <p:nvPr/>
+        </p:nvSpPr>
+        <p:spPr>
+          <a:xfrm rot="10800000">
+            <a:off x="11369040" y="2160270"/>
+            <a:ext cx="822960" cy="822960"/>
+          </a:xfrm>
+          <a:prstGeom prst="rtTriangle">
+            <a:avLst/>
+          </a:prstGeom>
+          <a:solidFill>
+            <a:srgbClr val="50E6FF"/>
+          </a:solidFill>
+          <a:ln>
+            <a:noFill/>
+          </a:ln>
+          <a:effectLst/>
+        </p:spPr>
+        <p:style>
+          <a:lnRef idx="1">
+            <a:schemeClr val="accent1"/>
+          </a:lnRef>
+          <a:fillRef idx="3">
+            <a:schemeClr val="accent1"/>
+          </a:fillRef>
+          <a:effectRef idx="2">
+            <a:schemeClr val="accent1"/>
+          </a:effectRef>
+          <a:fontRef idx="minor">
+            <a:schemeClr val="lt1"/>
+          </a:fontRef>
+        </p:style>
+        <p:txBody>
+          <a:bodyPr rtlCol="0" anchor="ctr"/>
+          <a:lstStyle/>
+          <a:p>
+            <a:pPr algn="ctr"/>
+          </a:p>
+        </p:txBody>
+      </p:sp>
+      <p:sp>
+        <p:nvSpPr>
+          <p:cNvPr id="15" name="AICOE_GEO_ACCENT_Right Triangle 14"/>
+          <p:cNvSpPr/>
+          <p:nvPr/>
+        </p:nvSpPr>
+        <p:spPr>
+          <a:xfrm>
+            <a:off x="11369040" y="3874770"/>
+            <a:ext cx="822960" cy="822960"/>
+          </a:xfrm>
+          <a:prstGeom prst="rtTriangle">
+            <a:avLst/>
+          </a:prstGeom>
+          <a:solidFill>
+            <a:srgbClr val="0067B8"/>
+          </a:solidFill>
+          <a:ln>
+            <a:noFill/>
+          </a:ln>
+          <a:effectLst/>
+        </p:spPr>
+        <p:style>
+          <a:lnRef idx="1">
+            <a:schemeClr val="accent1"/>
+          </a:lnRef>
+          <a:fillRef idx="3">
+            <a:schemeClr val="accent1"/>
+          </a:fillRef>
+          <a:effectRef idx="2">
+            <a:schemeClr val="accent1"/>
+          </a:effectRef>
+          <a:fontRef idx="minor">
+            <a:schemeClr val="lt1"/>
+          </a:fontRef>
+        </p:style>
+        <p:txBody>
+          <a:bodyPr rtlCol="0" anchor="ctr"/>
+          <a:lstStyle/>
+          <a:p>
+            <a:pPr algn="ctr"/>
+          </a:p>
+        </p:txBody>
+      </p:sp>
+      <p:sp>
+        <p:nvSpPr>
+          <p:cNvPr id="16" name="AICOE_GEO_ACCENT_Right Triangle 15"/>
+          <p:cNvSpPr/>
+          <p:nvPr/>
+        </p:nvSpPr>
+        <p:spPr>
+          <a:xfrm rot="5400000">
+            <a:off x="11369040" y="5589270"/>
+            <a:ext cx="822960" cy="822960"/>
+          </a:xfrm>
+          <a:prstGeom prst="rtTriangle">
+            <a:avLst/>
+          </a:prstGeom>
+          <a:solidFill>
+            <a:srgbClr val="50E6FF"/>
+          </a:solidFill>
+          <a:ln>
+            <a:noFill/>
+          </a:ln>
+          <a:effectLst/>
+        </p:spPr>
+        <p:style>
+          <a:lnRef idx="1">
+            <a:schemeClr val="accent1"/>
+          </a:lnRef>
+          <a:fillRef idx="3">
+            <a:schemeClr val="accent1"/>
+          </a:fillRef>
+          <a:effectRef idx="2">
+            <a:schemeClr val="accent1"/>
+          </a:effectRef>
+          <a:fontRef idx="minor">
+            <a:schemeClr val="lt1"/>
+          </a:fontRef>
+        </p:style>
+        <p:txBody>
+          <a:bodyPr rtlCol="0" anchor="ctr"/>
+          <a:lstStyle/>
+          <a:p>
+            <a:pPr algn="ctr"/>
+          </a:p>
+        </p:txBody>
+      </p:sp>
+      <p:sp>
+        <p:nvSpPr>
+          <p:cNvPr id="17" name="AICOE_GEO_ACCENT_Rectangle 16"/>
+          <p:cNvSpPr/>
+          <p:nvPr/>
+        </p:nvSpPr>
+        <p:spPr>
+          <a:xfrm>
+            <a:off x="11295888" y="0"/>
+            <a:ext cx="73152" cy="6858000"/>
+          </a:xfrm>
+          <a:prstGeom prst="rect">
+            <a:avLst/>
+          </a:prstGeom>
+          <a:solidFill>
+            <a:srgbClr val="0B1F3A"/>
+          </a:solidFill>
+          <a:ln>
+            <a:noFill/>
+          </a:ln>
+          <a:effectLst/>
+        </p:spPr>
+        <p:style>
+          <a:lnRef idx="1">
+            <a:schemeClr val="accent1"/>
+          </a:lnRef>
+          <a:fillRef idx="3">
+            <a:schemeClr val="accent1"/>
+          </a:fillRef>
+          <a:effectRef idx="2">
+            <a:schemeClr val="accent1"/>
+          </a:effectRef>
+          <a:fontRef idx="minor">
+            <a:schemeClr val="lt1"/>
+          </a:fontRef>
+        </p:style>
+        <p:txBody>
+          <a:bodyPr rtlCol="0" anchor="ctr"/>
+          <a:lstStyle/>
+          <a:p>
+            <a:pPr algn="ctr"/>
+          </a:p>
+        </p:txBody>
+      </p:sp>
     </p:spTree>
   </p:cSld>
   <p:clrMapOvr>
@@ -3734,6 +3954,94 @@
           </a:p>
         </p:txBody>
       </p:sp>
+      <p:sp>
+        <p:nvSpPr>
+          <p:cNvPr id="29" name="AICOE_GEO_ACCENT_Right Triangle 28"/>
+          <p:cNvSpPr/>
+          <p:nvPr/>
+        </p:nvSpPr>
+        <p:spPr>
+          <a:xfrm rot="5400000">
+            <a:off x="11762232" y="109728"/>
+            <a:ext cx="320040" cy="320040"/>
+          </a:xfrm>
+          <a:prstGeom prst="rtTriangle">
+            <a:avLst/>
+          </a:prstGeom>
+          <a:solidFill>
+            <a:srgbClr val="0B1F3A"/>
+          </a:solidFill>
+          <a:ln>
+            <a:noFill/>
+          </a:ln>
+          <a:effectLst/>
+        </p:spPr>
+        <p:style>
+          <a:lnRef idx="1">
+            <a:schemeClr val="accent1"/>
+          </a:lnRef>
+          <a:fillRef idx="3">
+            <a:schemeClr val="accent1"/>
+          </a:fillRef>
+          <a:effectRef idx="2">
+            <a:schemeClr val="accent1"/>
+          </a:effectRef>
+          <a:fontRef idx="minor">
+            <a:schemeClr val="lt1"/>
+          </a:fontRef>
+        </p:style>
+        <p:txBody>
+          <a:bodyPr rtlCol="0" anchor="ctr"/>
+          <a:lstStyle/>
+          <a:p>
+            <a:pPr algn="ctr"/>
+          </a:p>
+        </p:txBody>
+      </p:sp>
+      <p:sp>
+        <p:nvSpPr>
+          <p:cNvPr id="30" name="AICOE_GEO_ACCENT_Right Triangle 29"/>
+          <p:cNvSpPr/>
+          <p:nvPr/>
+        </p:nvSpPr>
+        <p:spPr>
+          <a:xfrm rot="5400000">
+            <a:off x="11874246" y="109728"/>
+            <a:ext cx="208026" cy="208026"/>
+          </a:xfrm>
+          <a:prstGeom prst="rtTriangle">
+            <a:avLst/>
+          </a:prstGeom>
+          <a:solidFill>
+            <a:srgbClr val="50E6FF"/>
+          </a:solidFill>
+          <a:ln>
+            <a:noFill/>
+          </a:ln>
+          <a:effectLst/>
+        </p:spPr>
+        <p:style>
+          <a:lnRef idx="1">
+            <a:schemeClr val="accent1"/>
+          </a:lnRef>
+          <a:fillRef idx="3">
+            <a:schemeClr val="accent1"/>
+          </a:fillRef>
+          <a:effectRef idx="2">
+            <a:schemeClr val="accent1"/>
+          </a:effectRef>
+          <a:fontRef idx="minor">
+            <a:schemeClr val="lt1"/>
+          </a:fontRef>
+        </p:style>
+        <p:txBody>
+          <a:bodyPr rtlCol="0" anchor="ctr"/>
+          <a:lstStyle/>
+          <a:p>
+            <a:pPr algn="ctr"/>
+          </a:p>
+        </p:txBody>
+      </p:sp>
     </p:spTree>
   </p:cSld>
   <p:clrMapOvr>
@@ -4907,6 +5215,94 @@
           </a:p>
         </p:txBody>
       </p:sp>
+      <p:sp>
+        <p:nvSpPr>
+          <p:cNvPr id="33" name="AICOE_GEO_ACCENT_Right Triangle 32"/>
+          <p:cNvSpPr/>
+          <p:nvPr/>
+        </p:nvSpPr>
+        <p:spPr>
+          <a:xfrm rot="5400000">
+            <a:off x="11762232" y="109728"/>
+            <a:ext cx="320040" cy="320040"/>
+          </a:xfrm>
+          <a:prstGeom prst="rtTriangle">
+            <a:avLst/>
+          </a:prstGeom>
+          <a:solidFill>
+            <a:srgbClr val="0B1F3A"/>
+          </a:solidFill>
+          <a:ln>
+            <a:noFill/>
+          </a:ln>
+          <a:effectLst/>
+        </p:spPr>
+        <p:style>
+          <a:lnRef idx="1">
+            <a:schemeClr val="accent1"/>
+          </a:lnRef>
+          <a:fillRef idx="3">
+            <a:schemeClr val="accent1"/>
+          </a:fillRef>
+          <a:effectRef idx="2">
+            <a:schemeClr val="accent1"/>
+          </a:effectRef>
+          <a:fontRef idx="minor">
+            <a:schemeClr val="lt1"/>
+          </a:fontRef>
+        </p:style>
+        <p:txBody>
+          <a:bodyPr rtlCol="0" anchor="ctr"/>
+          <a:lstStyle/>
+          <a:p>
+            <a:pPr algn="ctr"/>
+          </a:p>
+        </p:txBody>
+      </p:sp>
+      <p:sp>
+        <p:nvSpPr>
+          <p:cNvPr id="34" name="AICOE_GEO_ACCENT_Right Triangle 33"/>
+          <p:cNvSpPr/>
+          <p:nvPr/>
+        </p:nvSpPr>
+        <p:spPr>
+          <a:xfrm rot="5400000">
+            <a:off x="11874246" y="109728"/>
+            <a:ext cx="208026" cy="208026"/>
+          </a:xfrm>
+          <a:prstGeom prst="rtTriangle">
+            <a:avLst/>
+          </a:prstGeom>
+          <a:solidFill>
+            <a:srgbClr val="50E6FF"/>
+          </a:solidFill>
+          <a:ln>
+            <a:noFill/>
+          </a:ln>
+          <a:effectLst/>
+        </p:spPr>
+        <p:style>
+          <a:lnRef idx="1">
+            <a:schemeClr val="accent1"/>
+          </a:lnRef>
+          <a:fillRef idx="3">
+            <a:schemeClr val="accent1"/>
+          </a:fillRef>
+          <a:effectRef idx="2">
+            <a:schemeClr val="accent1"/>
+          </a:effectRef>
+          <a:fontRef idx="minor">
+            <a:schemeClr val="lt1"/>
+          </a:fontRef>
+        </p:style>
+        <p:txBody>
+          <a:bodyPr rtlCol="0" anchor="ctr"/>
+          <a:lstStyle/>
+          <a:p>
+            <a:pPr algn="ctr"/>
+          </a:p>
+        </p:txBody>
+      </p:sp>
     </p:spTree>
   </p:cSld>
   <p:clrMapOvr>
@@ -6436,6 +6832,94 @@
           </a:p>
         </p:txBody>
       </p:sp>
+      <p:sp>
+        <p:nvSpPr>
+          <p:cNvPr id="44" name="AICOE_GEO_ACCENT_Right Triangle 43"/>
+          <p:cNvSpPr/>
+          <p:nvPr/>
+        </p:nvSpPr>
+        <p:spPr>
+          <a:xfrm rot="5400000">
+            <a:off x="11762232" y="109728"/>
+            <a:ext cx="320040" cy="320040"/>
+          </a:xfrm>
+          <a:prstGeom prst="rtTriangle">
+            <a:avLst/>
+          </a:prstGeom>
+          <a:solidFill>
+            <a:srgbClr val="0B1F3A"/>
+          </a:solidFill>
+          <a:ln>
+            <a:noFill/>
+          </a:ln>
+          <a:effectLst/>
+        </p:spPr>
+        <p:style>
+          <a:lnRef idx="1">
+            <a:schemeClr val="accent1"/>
+          </a:lnRef>
+          <a:fillRef idx="3">
+            <a:schemeClr val="accent1"/>
+          </a:fillRef>
+          <a:effectRef idx="2">
+            <a:schemeClr val="accent1"/>
+          </a:effectRef>
+          <a:fontRef idx="minor">
+            <a:schemeClr val="lt1"/>
+          </a:fontRef>
+        </p:style>
+        <p:txBody>
+          <a:bodyPr rtlCol="0" anchor="ctr"/>
+          <a:lstStyle/>
+          <a:p>
+            <a:pPr algn="ctr"/>
+          </a:p>
+        </p:txBody>
+      </p:sp>
+      <p:sp>
+        <p:nvSpPr>
+          <p:cNvPr id="45" name="AICOE_GEO_ACCENT_Right Triangle 44"/>
+          <p:cNvSpPr/>
+          <p:nvPr/>
+        </p:nvSpPr>
+        <p:spPr>
+          <a:xfrm rot="5400000">
+            <a:off x="11874246" y="109728"/>
+            <a:ext cx="208026" cy="208026"/>
+          </a:xfrm>
+          <a:prstGeom prst="rtTriangle">
+            <a:avLst/>
+          </a:prstGeom>
+          <a:solidFill>
+            <a:srgbClr val="50E6FF"/>
+          </a:solidFill>
+          <a:ln>
+            <a:noFill/>
+          </a:ln>
+          <a:effectLst/>
+        </p:spPr>
+        <p:style>
+          <a:lnRef idx="1">
+            <a:schemeClr val="accent1"/>
+          </a:lnRef>
+          <a:fillRef idx="3">
+            <a:schemeClr val="accent1"/>
+          </a:fillRef>
+          <a:effectRef idx="2">
+            <a:schemeClr val="accent1"/>
+          </a:effectRef>
+          <a:fontRef idx="minor">
+            <a:schemeClr val="lt1"/>
+          </a:fontRef>
+        </p:style>
+        <p:txBody>
+          <a:bodyPr rtlCol="0" anchor="ctr"/>
+          <a:lstStyle/>
+          <a:p>
+            <a:pPr algn="ctr"/>
+          </a:p>
+        </p:txBody>
+      </p:sp>
     </p:spTree>
   </p:cSld>
   <p:clrMapOvr>
@@ -7540,6 +8024,94 @@
           </a:p>
         </p:txBody>
       </p:sp>
+      <p:sp>
+        <p:nvSpPr>
+          <p:cNvPr id="32" name="AICOE_GEO_ACCENT_Right Triangle 31"/>
+          <p:cNvSpPr/>
+          <p:nvPr/>
+        </p:nvSpPr>
+        <p:spPr>
+          <a:xfrm rot="5400000">
+            <a:off x="11762232" y="109728"/>
+            <a:ext cx="320040" cy="320040"/>
+          </a:xfrm>
+          <a:prstGeom prst="rtTriangle">
+            <a:avLst/>
+          </a:prstGeom>
+          <a:solidFill>
+            <a:srgbClr val="0B1F3A"/>
+          </a:solidFill>
+          <a:ln>
+            <a:noFill/>
+          </a:ln>
+          <a:effectLst/>
+        </p:spPr>
+        <p:style>
+          <a:lnRef idx="1">
+            <a:schemeClr val="accent1"/>
+          </a:lnRef>
+          <a:fillRef idx="3">
+            <a:schemeClr val="accent1"/>
+          </a:fillRef>
+          <a:effectRef idx="2">
+            <a:schemeClr val="accent1"/>
+          </a:effectRef>
+          <a:fontRef idx="minor">
+            <a:schemeClr val="lt1"/>
+          </a:fontRef>
+        </p:style>
+        <p:txBody>
+          <a:bodyPr rtlCol="0" anchor="ctr"/>
+          <a:lstStyle/>
+          <a:p>
+            <a:pPr algn="ctr"/>
+          </a:p>
+        </p:txBody>
+      </p:sp>
+      <p:sp>
+        <p:nvSpPr>
+          <p:cNvPr id="33" name="AICOE_GEO_ACCENT_Right Triangle 32"/>
+          <p:cNvSpPr/>
+          <p:nvPr/>
+        </p:nvSpPr>
+        <p:spPr>
+          <a:xfrm rot="5400000">
+            <a:off x="11874246" y="109728"/>
+            <a:ext cx="208026" cy="208026"/>
+          </a:xfrm>
+          <a:prstGeom prst="rtTriangle">
+            <a:avLst/>
+          </a:prstGeom>
+          <a:solidFill>
+            <a:srgbClr val="50E6FF"/>
+          </a:solidFill>
+          <a:ln>
+            <a:noFill/>
+          </a:ln>
+          <a:effectLst/>
+        </p:spPr>
+        <p:style>
+          <a:lnRef idx="1">
+            <a:schemeClr val="accent1"/>
+          </a:lnRef>
+          <a:fillRef idx="3">
+            <a:schemeClr val="accent1"/>
+          </a:fillRef>
+          <a:effectRef idx="2">
+            <a:schemeClr val="accent1"/>
+          </a:effectRef>
+          <a:fontRef idx="minor">
+            <a:schemeClr val="lt1"/>
+          </a:fontRef>
+        </p:style>
+        <p:txBody>
+          <a:bodyPr rtlCol="0" anchor="ctr"/>
+          <a:lstStyle/>
+          <a:p>
+            <a:pPr algn="ctr"/>
+          </a:p>
+        </p:txBody>
+      </p:sp>
     </p:spTree>
   </p:cSld>
   <p:clrMapOvr>
@@ -8302,6 +8874,94 @@
           </a:p>
         </p:txBody>
       </p:sp>
+      <p:sp>
+        <p:nvSpPr>
+          <p:cNvPr id="22" name="AICOE_GEO_ACCENT_Right Triangle 21"/>
+          <p:cNvSpPr/>
+          <p:nvPr/>
+        </p:nvSpPr>
+        <p:spPr>
+          <a:xfrm rot="5400000">
+            <a:off x="11762232" y="109728"/>
+            <a:ext cx="320040" cy="320040"/>
+          </a:xfrm>
+          <a:prstGeom prst="rtTriangle">
+            <a:avLst/>
+          </a:prstGeom>
+          <a:solidFill>
+            <a:srgbClr val="0B1F3A"/>
+          </a:solidFill>
+          <a:ln>
+            <a:noFill/>
+          </a:ln>
+          <a:effectLst/>
+        </p:spPr>
+        <p:style>
+          <a:lnRef idx="1">
+            <a:schemeClr val="accent1"/>
+          </a:lnRef>
+          <a:fillRef idx="3">
+            <a:schemeClr val="accent1"/>
+          </a:fillRef>
+          <a:effectRef idx="2">
+            <a:schemeClr val="accent1"/>
+          </a:effectRef>
+          <a:fontRef idx="minor">
+            <a:schemeClr val="lt1"/>
+          </a:fontRef>
+        </p:style>
+        <p:txBody>
+          <a:bodyPr rtlCol="0" anchor="ctr"/>
+          <a:lstStyle/>
+          <a:p>
+            <a:pPr algn="ctr"/>
+          </a:p>
+        </p:txBody>
+      </p:sp>
+      <p:sp>
+        <p:nvSpPr>
+          <p:cNvPr id="23" name="AICOE_GEO_ACCENT_Right Triangle 22"/>
+          <p:cNvSpPr/>
+          <p:nvPr/>
+        </p:nvSpPr>
+        <p:spPr>
+          <a:xfrm rot="5400000">
+            <a:off x="11874246" y="109728"/>
+            <a:ext cx="208026" cy="208026"/>
+          </a:xfrm>
+          <a:prstGeom prst="rtTriangle">
+            <a:avLst/>
+          </a:prstGeom>
+          <a:solidFill>
+            <a:srgbClr val="50E6FF"/>
+          </a:solidFill>
+          <a:ln>
+            <a:noFill/>
+          </a:ln>
+          <a:effectLst/>
+        </p:spPr>
+        <p:style>
+          <a:lnRef idx="1">
+            <a:schemeClr val="accent1"/>
+          </a:lnRef>
+          <a:fillRef idx="3">
+            <a:schemeClr val="accent1"/>
+          </a:fillRef>
+          <a:effectRef idx="2">
+            <a:schemeClr val="accent1"/>
+          </a:effectRef>
+          <a:fontRef idx="minor">
+            <a:schemeClr val="lt1"/>
+          </a:fontRef>
+        </p:style>
+        <p:txBody>
+          <a:bodyPr rtlCol="0" anchor="ctr"/>
+          <a:lstStyle/>
+          <a:p>
+            <a:pPr algn="ctr"/>
+          </a:p>
+        </p:txBody>
+      </p:sp>
     </p:spTree>
   </p:cSld>
   <p:clrMapOvr>
@@ -9398,6 +10058,94 @@
           </a:p>
         </p:txBody>
       </p:sp>
+      <p:sp>
+        <p:nvSpPr>
+          <p:cNvPr id="32" name="AICOE_GEO_ACCENT_Right Triangle 31"/>
+          <p:cNvSpPr/>
+          <p:nvPr/>
+        </p:nvSpPr>
+        <p:spPr>
+          <a:xfrm rot="5400000">
+            <a:off x="11762232" y="109728"/>
+            <a:ext cx="320040" cy="320040"/>
+          </a:xfrm>
+          <a:prstGeom prst="rtTriangle">
+            <a:avLst/>
+          </a:prstGeom>
+          <a:solidFill>
+            <a:srgbClr val="0B1F3A"/>
+          </a:solidFill>
+          <a:ln>
+            <a:noFill/>
+          </a:ln>
+          <a:effectLst/>
+        </p:spPr>
+        <p:style>
+          <a:lnRef idx="1">
+            <a:schemeClr val="accent1"/>
+          </a:lnRef>
+          <a:fillRef idx="3">
+            <a:schemeClr val="accent1"/>
+          </a:fillRef>
+          <a:effectRef idx="2">
+            <a:schemeClr val="accent1"/>
+          </a:effectRef>
+          <a:fontRef idx="minor">
+            <a:schemeClr val="lt1"/>
+          </a:fontRef>
+        </p:style>
+        <p:txBody>
+          <a:bodyPr rtlCol="0" anchor="ctr"/>
+          <a:lstStyle/>
+          <a:p>
+            <a:pPr algn="ctr"/>
+          </a:p>
+        </p:txBody>
+      </p:sp>
+      <p:sp>
+        <p:nvSpPr>
+          <p:cNvPr id="33" name="AICOE_GEO_ACCENT_Right Triangle 32"/>
+          <p:cNvSpPr/>
+          <p:nvPr/>
+        </p:nvSpPr>
+        <p:spPr>
+          <a:xfrm rot="5400000">
+            <a:off x="11874246" y="109728"/>
+            <a:ext cx="208026" cy="208026"/>
+          </a:xfrm>
+          <a:prstGeom prst="rtTriangle">
+            <a:avLst/>
+          </a:prstGeom>
+          <a:solidFill>
+            <a:srgbClr val="50E6FF"/>
+          </a:solidFill>
+          <a:ln>
+            <a:noFill/>
+          </a:ln>
+          <a:effectLst/>
+        </p:spPr>
+        <p:style>
+          <a:lnRef idx="1">
+            <a:schemeClr val="accent1"/>
+          </a:lnRef>
+          <a:fillRef idx="3">
+            <a:schemeClr val="accent1"/>
+          </a:fillRef>
+          <a:effectRef idx="2">
+            <a:schemeClr val="accent1"/>
+          </a:effectRef>
+          <a:fontRef idx="minor">
+            <a:schemeClr val="lt1"/>
+          </a:fontRef>
+        </p:style>
+        <p:txBody>
+          <a:bodyPr rtlCol="0" anchor="ctr"/>
+          <a:lstStyle/>
+          <a:p>
+            <a:pPr algn="ctr"/>
+          </a:p>
+        </p:txBody>
+      </p:sp>
     </p:spTree>
   </p:cSld>
   <p:clrMapOvr>
@@ -10370,6 +11118,94 @@
           </a:p>
         </p:txBody>
       </p:sp>
+      <p:sp>
+        <p:nvSpPr>
+          <p:cNvPr id="28" name="AICOE_GEO_ACCENT_Right Triangle 27"/>
+          <p:cNvSpPr/>
+          <p:nvPr/>
+        </p:nvSpPr>
+        <p:spPr>
+          <a:xfrm rot="5400000">
+            <a:off x="11762232" y="109728"/>
+            <a:ext cx="320040" cy="320040"/>
+          </a:xfrm>
+          <a:prstGeom prst="rtTriangle">
+            <a:avLst/>
+          </a:prstGeom>
+          <a:solidFill>
+            <a:srgbClr val="0B1F3A"/>
+          </a:solidFill>
+          <a:ln>
+            <a:noFill/>
+          </a:ln>
+          <a:effectLst/>
+        </p:spPr>
+        <p:style>
+          <a:lnRef idx="1">
+            <a:schemeClr val="accent1"/>
+          </a:lnRef>
+          <a:fillRef idx="3">
+            <a:schemeClr val="accent1"/>
+          </a:fillRef>
+          <a:effectRef idx="2">
+            <a:schemeClr val="accent1"/>
+          </a:effectRef>
+          <a:fontRef idx="minor">
+            <a:schemeClr val="lt1"/>
+          </a:fontRef>
+        </p:style>
+        <p:txBody>
+          <a:bodyPr rtlCol="0" anchor="ctr"/>
+          <a:lstStyle/>
+          <a:p>
+            <a:pPr algn="ctr"/>
+          </a:p>
+        </p:txBody>
+      </p:sp>
+      <p:sp>
+        <p:nvSpPr>
+          <p:cNvPr id="29" name="AICOE_GEO_ACCENT_Right Triangle 28"/>
+          <p:cNvSpPr/>
+          <p:nvPr/>
+        </p:nvSpPr>
+        <p:spPr>
+          <a:xfrm rot="5400000">
+            <a:off x="11874246" y="109728"/>
+            <a:ext cx="208026" cy="208026"/>
+          </a:xfrm>
+          <a:prstGeom prst="rtTriangle">
+            <a:avLst/>
+          </a:prstGeom>
+          <a:solidFill>
+            <a:srgbClr val="50E6FF"/>
+          </a:solidFill>
+          <a:ln>
+            <a:noFill/>
+          </a:ln>
+          <a:effectLst/>
+        </p:spPr>
+        <p:style>
+          <a:lnRef idx="1">
+            <a:schemeClr val="accent1"/>
+          </a:lnRef>
+          <a:fillRef idx="3">
+            <a:schemeClr val="accent1"/>
+          </a:fillRef>
+          <a:effectRef idx="2">
+            <a:schemeClr val="accent1"/>
+          </a:effectRef>
+          <a:fontRef idx="minor">
+            <a:schemeClr val="lt1"/>
+          </a:fontRef>
+        </p:style>
+        <p:txBody>
+          <a:bodyPr rtlCol="0" anchor="ctr"/>
+          <a:lstStyle/>
+          <a:p>
+            <a:pPr algn="ctr"/>
+          </a:p>
+        </p:txBody>
+      </p:sp>
     </p:spTree>
   </p:cSld>
   <p:clrMapOvr>
@@ -11800,6 +12636,94 @@
           </a:p>
         </p:txBody>
       </p:sp>
+      <p:sp>
+        <p:nvSpPr>
+          <p:cNvPr id="40" name="AICOE_GEO_ACCENT_Right Triangle 39"/>
+          <p:cNvSpPr/>
+          <p:nvPr/>
+        </p:nvSpPr>
+        <p:spPr>
+          <a:xfrm rot="5400000">
+            <a:off x="11762232" y="109728"/>
+            <a:ext cx="320040" cy="320040"/>
+          </a:xfrm>
+          <a:prstGeom prst="rtTriangle">
+            <a:avLst/>
+          </a:prstGeom>
+          <a:solidFill>
+            <a:srgbClr val="0B1F3A"/>
+          </a:solidFill>
+          <a:ln>
+            <a:noFill/>
+          </a:ln>
+          <a:effectLst/>
+        </p:spPr>
+        <p:style>
+          <a:lnRef idx="1">
+            <a:schemeClr val="accent1"/>
+          </a:lnRef>
+          <a:fillRef idx="3">
+            <a:schemeClr val="accent1"/>
+          </a:fillRef>
+          <a:effectRef idx="2">
+            <a:schemeClr val="accent1"/>
+          </a:effectRef>
+          <a:fontRef idx="minor">
+            <a:schemeClr val="lt1"/>
+          </a:fontRef>
+        </p:style>
+        <p:txBody>
+          <a:bodyPr rtlCol="0" anchor="ctr"/>
+          <a:lstStyle/>
+          <a:p>
+            <a:pPr algn="ctr"/>
+          </a:p>
+        </p:txBody>
+      </p:sp>
+      <p:sp>
+        <p:nvSpPr>
+          <p:cNvPr id="41" name="AICOE_GEO_ACCENT_Right Triangle 40"/>
+          <p:cNvSpPr/>
+          <p:nvPr/>
+        </p:nvSpPr>
+        <p:spPr>
+          <a:xfrm rot="5400000">
+            <a:off x="11874246" y="109728"/>
+            <a:ext cx="208026" cy="208026"/>
+          </a:xfrm>
+          <a:prstGeom prst="rtTriangle">
+            <a:avLst/>
+          </a:prstGeom>
+          <a:solidFill>
+            <a:srgbClr val="50E6FF"/>
+          </a:solidFill>
+          <a:ln>
+            <a:noFill/>
+          </a:ln>
+          <a:effectLst/>
+        </p:spPr>
+        <p:style>
+          <a:lnRef idx="1">
+            <a:schemeClr val="accent1"/>
+          </a:lnRef>
+          <a:fillRef idx="3">
+            <a:schemeClr val="accent1"/>
+          </a:fillRef>
+          <a:effectRef idx="2">
+            <a:schemeClr val="accent1"/>
+          </a:effectRef>
+          <a:fontRef idx="minor">
+            <a:schemeClr val="lt1"/>
+          </a:fontRef>
+        </p:style>
+        <p:txBody>
+          <a:bodyPr rtlCol="0" anchor="ctr"/>
+          <a:lstStyle/>
+          <a:p>
+            <a:pPr algn="ctr"/>
+          </a:p>
+        </p:txBody>
+      </p:sp>
     </p:spTree>
   </p:cSld>
   <p:clrMapOvr>
@@ -13245,6 +14169,94 @@
           </a:p>
         </p:txBody>
       </p:sp>
+      <p:sp>
+        <p:nvSpPr>
+          <p:cNvPr id="41" name="AICOE_GEO_ACCENT_Right Triangle 40"/>
+          <p:cNvSpPr/>
+          <p:nvPr/>
+        </p:nvSpPr>
+        <p:spPr>
+          <a:xfrm rot="5400000">
+            <a:off x="11762232" y="109728"/>
+            <a:ext cx="320040" cy="320040"/>
+          </a:xfrm>
+          <a:prstGeom prst="rtTriangle">
+            <a:avLst/>
+          </a:prstGeom>
+          <a:solidFill>
+            <a:srgbClr val="0B1F3A"/>
+          </a:solidFill>
+          <a:ln>
+            <a:noFill/>
+          </a:ln>
+          <a:effectLst/>
+        </p:spPr>
+        <p:style>
+          <a:lnRef idx="1">
+            <a:schemeClr val="accent1"/>
+          </a:lnRef>
+          <a:fillRef idx="3">
+            <a:schemeClr val="accent1"/>
+          </a:fillRef>
+          <a:effectRef idx="2">
+            <a:schemeClr val="accent1"/>
+          </a:effectRef>
+          <a:fontRef idx="minor">
+            <a:schemeClr val="lt1"/>
+          </a:fontRef>
+        </p:style>
+        <p:txBody>
+          <a:bodyPr rtlCol="0" anchor="ctr"/>
+          <a:lstStyle/>
+          <a:p>
+            <a:pPr algn="ctr"/>
+          </a:p>
+        </p:txBody>
+      </p:sp>
+      <p:sp>
+        <p:nvSpPr>
+          <p:cNvPr id="42" name="AICOE_GEO_ACCENT_Right Triangle 41"/>
+          <p:cNvSpPr/>
+          <p:nvPr/>
+        </p:nvSpPr>
+        <p:spPr>
+          <a:xfrm rot="5400000">
+            <a:off x="11874246" y="109728"/>
+            <a:ext cx="208026" cy="208026"/>
+          </a:xfrm>
+          <a:prstGeom prst="rtTriangle">
+            <a:avLst/>
+          </a:prstGeom>
+          <a:solidFill>
+            <a:srgbClr val="50E6FF"/>
+          </a:solidFill>
+          <a:ln>
+            <a:noFill/>
+          </a:ln>
+          <a:effectLst/>
+        </p:spPr>
+        <p:style>
+          <a:lnRef idx="1">
+            <a:schemeClr val="accent1"/>
+          </a:lnRef>
+          <a:fillRef idx="3">
+            <a:schemeClr val="accent1"/>
+          </a:fillRef>
+          <a:effectRef idx="2">
+            <a:schemeClr val="accent1"/>
+          </a:effectRef>
+          <a:fontRef idx="minor">
+            <a:schemeClr val="lt1"/>
+          </a:fontRef>
+        </p:style>
+        <p:txBody>
+          <a:bodyPr rtlCol="0" anchor="ctr"/>
+          <a:lstStyle/>
+          <a:p>
+            <a:pPr algn="ctr"/>
+          </a:p>
+        </p:txBody>
+      </p:sp>
     </p:spTree>
   </p:cSld>
   <p:clrMapOvr>
@@ -14131,6 +15143,94 @@
           </a:p>
         </p:txBody>
       </p:sp>
+      <p:sp>
+        <p:nvSpPr>
+          <p:cNvPr id="25" name="AICOE_GEO_ACCENT_Right Triangle 24"/>
+          <p:cNvSpPr/>
+          <p:nvPr/>
+        </p:nvSpPr>
+        <p:spPr>
+          <a:xfrm rot="5400000">
+            <a:off x="11762232" y="109728"/>
+            <a:ext cx="320040" cy="320040"/>
+          </a:xfrm>
+          <a:prstGeom prst="rtTriangle">
+            <a:avLst/>
+          </a:prstGeom>
+          <a:solidFill>
+            <a:srgbClr val="0B1F3A"/>
+          </a:solidFill>
+          <a:ln>
+            <a:noFill/>
+          </a:ln>
+          <a:effectLst/>
+        </p:spPr>
+        <p:style>
+          <a:lnRef idx="1">
+            <a:schemeClr val="accent1"/>
+          </a:lnRef>
+          <a:fillRef idx="3">
+            <a:schemeClr val="accent1"/>
+          </a:fillRef>
+          <a:effectRef idx="2">
+            <a:schemeClr val="accent1"/>
+          </a:effectRef>
+          <a:fontRef idx="minor">
+            <a:schemeClr val="lt1"/>
+          </a:fontRef>
+        </p:style>
+        <p:txBody>
+          <a:bodyPr rtlCol="0" anchor="ctr"/>
+          <a:lstStyle/>
+          <a:p>
+            <a:pPr algn="ctr"/>
+          </a:p>
+        </p:txBody>
+      </p:sp>
+      <p:sp>
+        <p:nvSpPr>
+          <p:cNvPr id="26" name="AICOE_GEO_ACCENT_Right Triangle 25"/>
+          <p:cNvSpPr/>
+          <p:nvPr/>
+        </p:nvSpPr>
+        <p:spPr>
+          <a:xfrm rot="5400000">
+            <a:off x="11874246" y="109728"/>
+            <a:ext cx="208026" cy="208026"/>
+          </a:xfrm>
+          <a:prstGeom prst="rtTriangle">
+            <a:avLst/>
+          </a:prstGeom>
+          <a:solidFill>
+            <a:srgbClr val="50E6FF"/>
+          </a:solidFill>
+          <a:ln>
+            <a:noFill/>
+          </a:ln>
+          <a:effectLst/>
+        </p:spPr>
+        <p:style>
+          <a:lnRef idx="1">
+            <a:schemeClr val="accent1"/>
+          </a:lnRef>
+          <a:fillRef idx="3">
+            <a:schemeClr val="accent1"/>
+          </a:fillRef>
+          <a:effectRef idx="2">
+            <a:schemeClr val="accent1"/>
+          </a:effectRef>
+          <a:fontRef idx="minor">
+            <a:schemeClr val="lt1"/>
+          </a:fontRef>
+        </p:style>
+        <p:txBody>
+          <a:bodyPr rtlCol="0" anchor="ctr"/>
+          <a:lstStyle/>
+          <a:p>
+            <a:pPr algn="ctr"/>
+          </a:p>
+        </p:txBody>
+      </p:sp>
     </p:spTree>
   </p:cSld>
   <p:clrMapOvr>
@@ -15025,6 +16125,94 @@
           </a:p>
         </p:txBody>
       </p:sp>
+      <p:sp>
+        <p:nvSpPr>
+          <p:cNvPr id="26" name="AICOE_GEO_ACCENT_Right Triangle 25"/>
+          <p:cNvSpPr/>
+          <p:nvPr/>
+        </p:nvSpPr>
+        <p:spPr>
+          <a:xfrm rot="5400000">
+            <a:off x="11762232" y="109728"/>
+            <a:ext cx="320040" cy="320040"/>
+          </a:xfrm>
+          <a:prstGeom prst="rtTriangle">
+            <a:avLst/>
+          </a:prstGeom>
+          <a:solidFill>
+            <a:srgbClr val="0B1F3A"/>
+          </a:solidFill>
+          <a:ln>
+            <a:noFill/>
+          </a:ln>
+          <a:effectLst/>
+        </p:spPr>
+        <p:style>
+          <a:lnRef idx="1">
+            <a:schemeClr val="accent1"/>
+          </a:lnRef>
+          <a:fillRef idx="3">
+            <a:schemeClr val="accent1"/>
+          </a:fillRef>
+          <a:effectRef idx="2">
+            <a:schemeClr val="accent1"/>
+          </a:effectRef>
+          <a:fontRef idx="minor">
+            <a:schemeClr val="lt1"/>
+          </a:fontRef>
+        </p:style>
+        <p:txBody>
+          <a:bodyPr rtlCol="0" anchor="ctr"/>
+          <a:lstStyle/>
+          <a:p>
+            <a:pPr algn="ctr"/>
+          </a:p>
+        </p:txBody>
+      </p:sp>
+      <p:sp>
+        <p:nvSpPr>
+          <p:cNvPr id="27" name="AICOE_GEO_ACCENT_Right Triangle 26"/>
+          <p:cNvSpPr/>
+          <p:nvPr/>
+        </p:nvSpPr>
+        <p:spPr>
+          <a:xfrm rot="5400000">
+            <a:off x="11874246" y="109728"/>
+            <a:ext cx="208026" cy="208026"/>
+          </a:xfrm>
+          <a:prstGeom prst="rtTriangle">
+            <a:avLst/>
+          </a:prstGeom>
+          <a:solidFill>
+            <a:srgbClr val="50E6FF"/>
+          </a:solidFill>
+          <a:ln>
+            <a:noFill/>
+          </a:ln>
+          <a:effectLst/>
+        </p:spPr>
+        <p:style>
+          <a:lnRef idx="1">
+            <a:schemeClr val="accent1"/>
+          </a:lnRef>
+          <a:fillRef idx="3">
+            <a:schemeClr val="accent1"/>
+          </a:fillRef>
+          <a:effectRef idx="2">
+            <a:schemeClr val="accent1"/>
+          </a:effectRef>
+          <a:fontRef idx="minor">
+            <a:schemeClr val="lt1"/>
+          </a:fontRef>
+        </p:style>
+        <p:txBody>
+          <a:bodyPr rtlCol="0" anchor="ctr"/>
+          <a:lstStyle/>
+          <a:p>
+            <a:pPr algn="ctr"/>
+          </a:p>
+        </p:txBody>
+      </p:sp>
     </p:spTree>
   </p:cSld>
   <p:clrMapOvr>
@@ -15855,6 +17043,94 @@
           </a:p>
         </p:txBody>
       </p:sp>
+      <p:sp>
+        <p:nvSpPr>
+          <p:cNvPr id="24" name="AICOE_GEO_ACCENT_Right Triangle 23"/>
+          <p:cNvSpPr/>
+          <p:nvPr/>
+        </p:nvSpPr>
+        <p:spPr>
+          <a:xfrm rot="5400000">
+            <a:off x="11762232" y="109728"/>
+            <a:ext cx="320040" cy="320040"/>
+          </a:xfrm>
+          <a:prstGeom prst="rtTriangle">
+            <a:avLst/>
+          </a:prstGeom>
+          <a:solidFill>
+            <a:srgbClr val="0B1F3A"/>
+          </a:solidFill>
+          <a:ln>
+            <a:noFill/>
+          </a:ln>
+          <a:effectLst/>
+        </p:spPr>
+        <p:style>
+          <a:lnRef idx="1">
+            <a:schemeClr val="accent1"/>
+          </a:lnRef>
+          <a:fillRef idx="3">
+            <a:schemeClr val="accent1"/>
+          </a:fillRef>
+          <a:effectRef idx="2">
+            <a:schemeClr val="accent1"/>
+          </a:effectRef>
+          <a:fontRef idx="minor">
+            <a:schemeClr val="lt1"/>
+          </a:fontRef>
+        </p:style>
+        <p:txBody>
+          <a:bodyPr rtlCol="0" anchor="ctr"/>
+          <a:lstStyle/>
+          <a:p>
+            <a:pPr algn="ctr"/>
+          </a:p>
+        </p:txBody>
+      </p:sp>
+      <p:sp>
+        <p:nvSpPr>
+          <p:cNvPr id="25" name="AICOE_GEO_ACCENT_Right Triangle 24"/>
+          <p:cNvSpPr/>
+          <p:nvPr/>
+        </p:nvSpPr>
+        <p:spPr>
+          <a:xfrm rot="5400000">
+            <a:off x="11874246" y="109728"/>
+            <a:ext cx="208026" cy="208026"/>
+          </a:xfrm>
+          <a:prstGeom prst="rtTriangle">
+            <a:avLst/>
+          </a:prstGeom>
+          <a:solidFill>
+            <a:srgbClr val="50E6FF"/>
+          </a:solidFill>
+          <a:ln>
+            <a:noFill/>
+          </a:ln>
+          <a:effectLst/>
+        </p:spPr>
+        <p:style>
+          <a:lnRef idx="1">
+            <a:schemeClr val="accent1"/>
+          </a:lnRef>
+          <a:fillRef idx="3">
+            <a:schemeClr val="accent1"/>
+          </a:fillRef>
+          <a:effectRef idx="2">
+            <a:schemeClr val="accent1"/>
+          </a:effectRef>
+          <a:fontRef idx="minor">
+            <a:schemeClr val="lt1"/>
+          </a:fontRef>
+        </p:style>
+        <p:txBody>
+          <a:bodyPr rtlCol="0" anchor="ctr"/>
+          <a:lstStyle/>
+          <a:p>
+            <a:pPr algn="ctr"/>
+          </a:p>
+        </p:txBody>
+      </p:sp>
     </p:spTree>
   </p:cSld>
   <p:clrMapOvr>
@@ -17232,6 +18508,94 @@
           </a:p>
         </p:txBody>
       </p:sp>
+      <p:sp>
+        <p:nvSpPr>
+          <p:cNvPr id="39" name="AICOE_GEO_ACCENT_Right Triangle 38"/>
+          <p:cNvSpPr/>
+          <p:nvPr/>
+        </p:nvSpPr>
+        <p:spPr>
+          <a:xfrm rot="5400000">
+            <a:off x="11762232" y="109728"/>
+            <a:ext cx="320040" cy="320040"/>
+          </a:xfrm>
+          <a:prstGeom prst="rtTriangle">
+            <a:avLst/>
+          </a:prstGeom>
+          <a:solidFill>
+            <a:srgbClr val="0B1F3A"/>
+          </a:solidFill>
+          <a:ln>
+            <a:noFill/>
+          </a:ln>
+          <a:effectLst/>
+        </p:spPr>
+        <p:style>
+          <a:lnRef idx="1">
+            <a:schemeClr val="accent1"/>
+          </a:lnRef>
+          <a:fillRef idx="3">
+            <a:schemeClr val="accent1"/>
+          </a:fillRef>
+          <a:effectRef idx="2">
+            <a:schemeClr val="accent1"/>
+          </a:effectRef>
+          <a:fontRef idx="minor">
+            <a:schemeClr val="lt1"/>
+          </a:fontRef>
+        </p:style>
+        <p:txBody>
+          <a:bodyPr rtlCol="0" anchor="ctr"/>
+          <a:lstStyle/>
+          <a:p>
+            <a:pPr algn="ctr"/>
+          </a:p>
+        </p:txBody>
+      </p:sp>
+      <p:sp>
+        <p:nvSpPr>
+          <p:cNvPr id="40" name="AICOE_GEO_ACCENT_Right Triangle 39"/>
+          <p:cNvSpPr/>
+          <p:nvPr/>
+        </p:nvSpPr>
+        <p:spPr>
+          <a:xfrm rot="5400000">
+            <a:off x="11874246" y="109728"/>
+            <a:ext cx="208026" cy="208026"/>
+          </a:xfrm>
+          <a:prstGeom prst="rtTriangle">
+            <a:avLst/>
+          </a:prstGeom>
+          <a:solidFill>
+            <a:srgbClr val="50E6FF"/>
+          </a:solidFill>
+          <a:ln>
+            <a:noFill/>
+          </a:ln>
+          <a:effectLst/>
+        </p:spPr>
+        <p:style>
+          <a:lnRef idx="1">
+            <a:schemeClr val="accent1"/>
+          </a:lnRef>
+          <a:fillRef idx="3">
+            <a:schemeClr val="accent1"/>
+          </a:fillRef>
+          <a:effectRef idx="2">
+            <a:schemeClr val="accent1"/>
+          </a:effectRef>
+          <a:fontRef idx="minor">
+            <a:schemeClr val="lt1"/>
+          </a:fontRef>
+        </p:style>
+        <p:txBody>
+          <a:bodyPr rtlCol="0" anchor="ctr"/>
+          <a:lstStyle/>
+          <a:p>
+            <a:pPr algn="ctr"/>
+          </a:p>
+        </p:txBody>
+      </p:sp>
     </p:spTree>
   </p:cSld>
   <p:clrMapOvr>
@@ -18618,6 +19982,94 @@
           </a:p>
         </p:txBody>
       </p:sp>
+      <p:sp>
+        <p:nvSpPr>
+          <p:cNvPr id="35" name="AICOE_GEO_ACCENT_Right Triangle 34"/>
+          <p:cNvSpPr/>
+          <p:nvPr/>
+        </p:nvSpPr>
+        <p:spPr>
+          <a:xfrm rot="5400000">
+            <a:off x="11762232" y="109728"/>
+            <a:ext cx="320040" cy="320040"/>
+          </a:xfrm>
+          <a:prstGeom prst="rtTriangle">
+            <a:avLst/>
+          </a:prstGeom>
+          <a:solidFill>
+            <a:srgbClr val="0B1F3A"/>
+          </a:solidFill>
+          <a:ln>
+            <a:noFill/>
+          </a:ln>
+          <a:effectLst/>
+        </p:spPr>
+        <p:style>
+          <a:lnRef idx="1">
+            <a:schemeClr val="accent1"/>
+          </a:lnRef>
+          <a:fillRef idx="3">
+            <a:schemeClr val="accent1"/>
+          </a:fillRef>
+          <a:effectRef idx="2">
+            <a:schemeClr val="accent1"/>
+          </a:effectRef>
+          <a:fontRef idx="minor">
+            <a:schemeClr val="lt1"/>
+          </a:fontRef>
+        </p:style>
+        <p:txBody>
+          <a:bodyPr rtlCol="0" anchor="ctr"/>
+          <a:lstStyle/>
+          <a:p>
+            <a:pPr algn="ctr"/>
+          </a:p>
+        </p:txBody>
+      </p:sp>
+      <p:sp>
+        <p:nvSpPr>
+          <p:cNvPr id="36" name="AICOE_GEO_ACCENT_Right Triangle 35"/>
+          <p:cNvSpPr/>
+          <p:nvPr/>
+        </p:nvSpPr>
+        <p:spPr>
+          <a:xfrm rot="5400000">
+            <a:off x="11874246" y="109728"/>
+            <a:ext cx="208026" cy="208026"/>
+          </a:xfrm>
+          <a:prstGeom prst="rtTriangle">
+            <a:avLst/>
+          </a:prstGeom>
+          <a:solidFill>
+            <a:srgbClr val="50E6FF"/>
+          </a:solidFill>
+          <a:ln>
+            <a:noFill/>
+          </a:ln>
+          <a:effectLst/>
+        </p:spPr>
+        <p:style>
+          <a:lnRef idx="1">
+            <a:schemeClr val="accent1"/>
+          </a:lnRef>
+          <a:fillRef idx="3">
+            <a:schemeClr val="accent1"/>
+          </a:fillRef>
+          <a:effectRef idx="2">
+            <a:schemeClr val="accent1"/>
+          </a:effectRef>
+          <a:fontRef idx="minor">
+            <a:schemeClr val="lt1"/>
+          </a:fontRef>
+        </p:style>
+        <p:txBody>
+          <a:bodyPr rtlCol="0" anchor="ctr"/>
+          <a:lstStyle/>
+          <a:p>
+            <a:pPr algn="ctr"/>
+          </a:p>
+        </p:txBody>
+      </p:sp>
     </p:spTree>
   </p:cSld>
   <p:clrMapOvr>
@@ -20515,6 +21967,94 @@
           </a:p>
         </p:txBody>
       </p:sp>
+      <p:sp>
+        <p:nvSpPr>
+          <p:cNvPr id="53" name="AICOE_GEO_ACCENT_Right Triangle 52"/>
+          <p:cNvSpPr/>
+          <p:nvPr/>
+        </p:nvSpPr>
+        <p:spPr>
+          <a:xfrm rot="5400000">
+            <a:off x="11762232" y="109728"/>
+            <a:ext cx="320040" cy="320040"/>
+          </a:xfrm>
+          <a:prstGeom prst="rtTriangle">
+            <a:avLst/>
+          </a:prstGeom>
+          <a:solidFill>
+            <a:srgbClr val="0B1F3A"/>
+          </a:solidFill>
+          <a:ln>
+            <a:noFill/>
+          </a:ln>
+          <a:effectLst/>
+        </p:spPr>
+        <p:style>
+          <a:lnRef idx="1">
+            <a:schemeClr val="accent1"/>
+          </a:lnRef>
+          <a:fillRef idx="3">
+            <a:schemeClr val="accent1"/>
+          </a:fillRef>
+          <a:effectRef idx="2">
+            <a:schemeClr val="accent1"/>
+          </a:effectRef>
+          <a:fontRef idx="minor">
+            <a:schemeClr val="lt1"/>
+          </a:fontRef>
+        </p:style>
+        <p:txBody>
+          <a:bodyPr rtlCol="0" anchor="ctr"/>
+          <a:lstStyle/>
+          <a:p>
+            <a:pPr algn="ctr"/>
+          </a:p>
+        </p:txBody>
+      </p:sp>
+      <p:sp>
+        <p:nvSpPr>
+          <p:cNvPr id="54" name="AICOE_GEO_ACCENT_Right Triangle 53"/>
+          <p:cNvSpPr/>
+          <p:nvPr/>
+        </p:nvSpPr>
+        <p:spPr>
+          <a:xfrm rot="5400000">
+            <a:off x="11874246" y="109728"/>
+            <a:ext cx="208026" cy="208026"/>
+          </a:xfrm>
+          <a:prstGeom prst="rtTriangle">
+            <a:avLst/>
+          </a:prstGeom>
+          <a:solidFill>
+            <a:srgbClr val="50E6FF"/>
+          </a:solidFill>
+          <a:ln>
+            <a:noFill/>
+          </a:ln>
+          <a:effectLst/>
+        </p:spPr>
+        <p:style>
+          <a:lnRef idx="1">
+            <a:schemeClr val="accent1"/>
+          </a:lnRef>
+          <a:fillRef idx="3">
+            <a:schemeClr val="accent1"/>
+          </a:fillRef>
+          <a:effectRef idx="2">
+            <a:schemeClr val="accent1"/>
+          </a:effectRef>
+          <a:fontRef idx="minor">
+            <a:schemeClr val="lt1"/>
+          </a:fontRef>
+        </p:style>
+        <p:txBody>
+          <a:bodyPr rtlCol="0" anchor="ctr"/>
+          <a:lstStyle/>
+          <a:p>
+            <a:pPr algn="ctr"/>
+          </a:p>
+        </p:txBody>
+      </p:sp>
     </p:spTree>
   </p:cSld>
   <p:clrMapOvr>
@@ -22525,6 +24065,94 @@
           </a:p>
         </p:txBody>
       </p:sp>
+      <p:sp>
+        <p:nvSpPr>
+          <p:cNvPr id="57" name="AICOE_GEO_ACCENT_Right Triangle 56"/>
+          <p:cNvSpPr/>
+          <p:nvPr/>
+        </p:nvSpPr>
+        <p:spPr>
+          <a:xfrm rot="5400000">
+            <a:off x="11762232" y="109728"/>
+            <a:ext cx="320040" cy="320040"/>
+          </a:xfrm>
+          <a:prstGeom prst="rtTriangle">
+            <a:avLst/>
+          </a:prstGeom>
+          <a:solidFill>
+            <a:srgbClr val="0B1F3A"/>
+          </a:solidFill>
+          <a:ln>
+            <a:noFill/>
+          </a:ln>
+          <a:effectLst/>
+        </p:spPr>
+        <p:style>
+          <a:lnRef idx="1">
+            <a:schemeClr val="accent1"/>
+          </a:lnRef>
+          <a:fillRef idx="3">
+            <a:schemeClr val="accent1"/>
+          </a:fillRef>
+          <a:effectRef idx="2">
+            <a:schemeClr val="accent1"/>
+          </a:effectRef>
+          <a:fontRef idx="minor">
+            <a:schemeClr val="lt1"/>
+          </a:fontRef>
+        </p:style>
+        <p:txBody>
+          <a:bodyPr rtlCol="0" anchor="ctr"/>
+          <a:lstStyle/>
+          <a:p>
+            <a:pPr algn="ctr"/>
+          </a:p>
+        </p:txBody>
+      </p:sp>
+      <p:sp>
+        <p:nvSpPr>
+          <p:cNvPr id="58" name="AICOE_GEO_ACCENT_Right Triangle 57"/>
+          <p:cNvSpPr/>
+          <p:nvPr/>
+        </p:nvSpPr>
+        <p:spPr>
+          <a:xfrm rot="5400000">
+            <a:off x="11874246" y="109728"/>
+            <a:ext cx="208026" cy="208026"/>
+          </a:xfrm>
+          <a:prstGeom prst="rtTriangle">
+            <a:avLst/>
+          </a:prstGeom>
+          <a:solidFill>
+            <a:srgbClr val="50E6FF"/>
+          </a:solidFill>
+          <a:ln>
+            <a:noFill/>
+          </a:ln>
+          <a:effectLst/>
+        </p:spPr>
+        <p:style>
+          <a:lnRef idx="1">
+            <a:schemeClr val="accent1"/>
+          </a:lnRef>
+          <a:fillRef idx="3">
+            <a:schemeClr val="accent1"/>
+          </a:fillRef>
+          <a:effectRef idx="2">
+            <a:schemeClr val="accent1"/>
+          </a:effectRef>
+          <a:fontRef idx="minor">
+            <a:schemeClr val="lt1"/>
+          </a:fontRef>
+        </p:style>
+        <p:txBody>
+          <a:bodyPr rtlCol="0" anchor="ctr"/>
+          <a:lstStyle/>
+          <a:p>
+            <a:pPr algn="ctr"/>
+          </a:p>
+        </p:txBody>
+      </p:sp>
     </p:spTree>
   </p:cSld>
   <p:clrMapOvr>
@@ -26267,6 +27895,94 @@
           </a:p>
         </p:txBody>
       </p:sp>
+      <p:sp>
+        <p:nvSpPr>
+          <p:cNvPr id="105" name="AICOE_GEO_ACCENT_Right Triangle 104"/>
+          <p:cNvSpPr/>
+          <p:nvPr/>
+        </p:nvSpPr>
+        <p:spPr>
+          <a:xfrm rot="5400000">
+            <a:off x="11762232" y="109728"/>
+            <a:ext cx="320040" cy="320040"/>
+          </a:xfrm>
+          <a:prstGeom prst="rtTriangle">
+            <a:avLst/>
+          </a:prstGeom>
+          <a:solidFill>
+            <a:srgbClr val="0B1F3A"/>
+          </a:solidFill>
+          <a:ln>
+            <a:noFill/>
+          </a:ln>
+          <a:effectLst/>
+        </p:spPr>
+        <p:style>
+          <a:lnRef idx="1">
+            <a:schemeClr val="accent1"/>
+          </a:lnRef>
+          <a:fillRef idx="3">
+            <a:schemeClr val="accent1"/>
+          </a:fillRef>
+          <a:effectRef idx="2">
+            <a:schemeClr val="accent1"/>
+          </a:effectRef>
+          <a:fontRef idx="minor">
+            <a:schemeClr val="lt1"/>
+          </a:fontRef>
+        </p:style>
+        <p:txBody>
+          <a:bodyPr rtlCol="0" anchor="ctr"/>
+          <a:lstStyle/>
+          <a:p>
+            <a:pPr algn="ctr"/>
+          </a:p>
+        </p:txBody>
+      </p:sp>
+      <p:sp>
+        <p:nvSpPr>
+          <p:cNvPr id="106" name="AICOE_GEO_ACCENT_Right Triangle 105"/>
+          <p:cNvSpPr/>
+          <p:nvPr/>
+        </p:nvSpPr>
+        <p:spPr>
+          <a:xfrm rot="5400000">
+            <a:off x="11874246" y="109728"/>
+            <a:ext cx="208026" cy="208026"/>
+          </a:xfrm>
+          <a:prstGeom prst="rtTriangle">
+            <a:avLst/>
+          </a:prstGeom>
+          <a:solidFill>
+            <a:srgbClr val="50E6FF"/>
+          </a:solidFill>
+          <a:ln>
+            <a:noFill/>
+          </a:ln>
+          <a:effectLst/>
+        </p:spPr>
+        <p:style>
+          <a:lnRef idx="1">
+            <a:schemeClr val="accent1"/>
+          </a:lnRef>
+          <a:fillRef idx="3">
+            <a:schemeClr val="accent1"/>
+          </a:fillRef>
+          <a:effectRef idx="2">
+            <a:schemeClr val="accent1"/>
+          </a:effectRef>
+          <a:fontRef idx="minor">
+            <a:schemeClr val="lt1"/>
+          </a:fontRef>
+        </p:style>
+        <p:txBody>
+          <a:bodyPr rtlCol="0" anchor="ctr"/>
+          <a:lstStyle/>
+          <a:p>
+            <a:pPr algn="ctr"/>
+          </a:p>
+        </p:txBody>
+      </p:sp>
     </p:spTree>
   </p:cSld>
   <p:clrMapOvr>
@@ -31055,6 +32771,94 @@
               <a:t>9 / 19</a:t>
             </a:r>
             <a:endParaRPr lang="en-US" sz="900" dirty="0"/>
+          </a:p>
+        </p:txBody>
+      </p:sp>
+      <p:sp>
+        <p:nvSpPr>
+          <p:cNvPr id="136" name="AICOE_GEO_ACCENT_Right Triangle 135"/>
+          <p:cNvSpPr/>
+          <p:nvPr/>
+        </p:nvSpPr>
+        <p:spPr>
+          <a:xfrm rot="5400000">
+            <a:off x="11762232" y="109728"/>
+            <a:ext cx="320040" cy="320040"/>
+          </a:xfrm>
+          <a:prstGeom prst="rtTriangle">
+            <a:avLst/>
+          </a:prstGeom>
+          <a:solidFill>
+            <a:srgbClr val="0B1F3A"/>
+          </a:solidFill>
+          <a:ln>
+            <a:noFill/>
+          </a:ln>
+          <a:effectLst/>
+        </p:spPr>
+        <p:style>
+          <a:lnRef idx="1">
+            <a:schemeClr val="accent1"/>
+          </a:lnRef>
+          <a:fillRef idx="3">
+            <a:schemeClr val="accent1"/>
+          </a:fillRef>
+          <a:effectRef idx="2">
+            <a:schemeClr val="accent1"/>
+          </a:effectRef>
+          <a:fontRef idx="minor">
+            <a:schemeClr val="lt1"/>
+          </a:fontRef>
+        </p:style>
+        <p:txBody>
+          <a:bodyPr rtlCol="0" anchor="ctr"/>
+          <a:lstStyle/>
+          <a:p>
+            <a:pPr algn="ctr"/>
+          </a:p>
+        </p:txBody>
+      </p:sp>
+      <p:sp>
+        <p:nvSpPr>
+          <p:cNvPr id="137" name="AICOE_GEO_ACCENT_Right Triangle 136"/>
+          <p:cNvSpPr/>
+          <p:nvPr/>
+        </p:nvSpPr>
+        <p:spPr>
+          <a:xfrm rot="5400000">
+            <a:off x="11874246" y="109728"/>
+            <a:ext cx="208026" cy="208026"/>
+          </a:xfrm>
+          <a:prstGeom prst="rtTriangle">
+            <a:avLst/>
+          </a:prstGeom>
+          <a:solidFill>
+            <a:srgbClr val="50E6FF"/>
+          </a:solidFill>
+          <a:ln>
+            <a:noFill/>
+          </a:ln>
+          <a:effectLst/>
+        </p:spPr>
+        <p:style>
+          <a:lnRef idx="1">
+            <a:schemeClr val="accent1"/>
+          </a:lnRef>
+          <a:fillRef idx="3">
+            <a:schemeClr val="accent1"/>
+          </a:fillRef>
+          <a:effectRef idx="2">
+            <a:schemeClr val="accent1"/>
+          </a:effectRef>
+          <a:fontRef idx="minor">
+            <a:schemeClr val="lt1"/>
+          </a:fontRef>
+        </p:style>
+        <p:txBody>
+          <a:bodyPr rtlCol="0" anchor="ctr"/>
+          <a:lstStyle/>
+          <a:p>
+            <a:pPr algn="ctr"/>
           </a:p>
         </p:txBody>
       </p:sp>
